--- a/lecons/USA/Environment and Development/15_USA_ENV_FS01_Contrast_in_Development_within_Cameroon.pptx
+++ b/lecons/USA/Environment and Development/15_USA_ENV_FS01_Contrast_in_Development_within_Cameroon.pptx
@@ -13866,7 +13866,7 @@
               <a:buNone/>
             </a:pPr>
             <a:r>
-              <a:rPr lang="en-US" sz="4000" b="1" dirty="0">
+              <a:rPr lang="en-US" sz="3200" b="1" dirty="0">
                 <a:solidFill>
                   <a:srgbClr val="111111"/>
                 </a:solidFill>
@@ -13876,7 +13876,7 @@
               </a:rPr>
               <a:t>Topic: Geography of Cameroon</a:t>
             </a:r>
-            <a:endParaRPr lang="en-US" sz="4000" dirty="0"/>
+            <a:endParaRPr lang="en-US" sz="3200" dirty="0"/>
           </a:p>
           <a:p>
             <a:pPr algn="l" indent="0" marL="0">
@@ -13886,7 +13886,7 @@
               <a:buNone/>
             </a:pPr>
             <a:r>
-              <a:rPr lang="en-US" sz="4000" b="1" dirty="0">
+              <a:rPr lang="en-US" sz="3200" b="1" dirty="0">
                 <a:solidFill>
                   <a:srgbClr val="111111"/>
                 </a:solidFill>
@@ -13896,7 +13896,7 @@
               </a:rPr>
               <a:t>Sub-topic: Regional Development and Inequality</a:t>
             </a:r>
-            <a:endParaRPr lang="en-US" sz="4000" dirty="0"/>
+            <a:endParaRPr lang="en-US" sz="3200" dirty="0"/>
           </a:p>
           <a:p>
             <a:pPr algn="l" indent="0" marL="0">
@@ -13906,7 +13906,7 @@
               <a:buNone/>
             </a:pPr>
             <a:r>
-              <a:rPr lang="en-US" sz="4000" b="1" dirty="0">
+              <a:rPr lang="en-US" sz="3200" b="1" dirty="0">
                 <a:solidFill>
                   <a:srgbClr val="990011"/>
                 </a:solidFill>
@@ -13916,7 +13916,7 @@
               </a:rPr>
               <a:t>Further Study 1: Contrast in Development within Cameroon</a:t>
             </a:r>
-            <a:endParaRPr lang="en-US" sz="4000" dirty="0"/>
+            <a:endParaRPr lang="en-US" sz="3200" dirty="0"/>
           </a:p>
         </p:txBody>
       </p:sp>
